--- a/madd-decks/dagger-alif/02-noon-ya.pptx
+++ b/madd-decks/dagger-alif/02-noon-ya.pptx
@@ -4,6 +4,9 @@
   <p:sldMasterIdLst>
     <p:sldMasterId id="2147483648" r:id="rId1"/>
   </p:sldMasterIdLst>
+  <p:notesMasterIdLst>
+    <p:notesMasterId r:id="rId22"/>
+  </p:notesMasterIdLst>
   <p:sldIdLst>
     <p:sldId id="256" r:id="rId2"/>
     <p:sldId id="257" r:id="rId3"/>
@@ -26,9 +29,6 @@
     <p:sldId id="274" r:id="rId20"/>
     <p:sldId id="275" r:id="rId21"/>
   </p:sldIdLst>
-  <p:notesMasterIdLst>
-    <p:notesMasterId r:id="rId22"/>
-  </p:notesMasterIdLst>
   <p:sldSz cx="9144000" cy="5143500"/>
   <p:notesSz cx="5143500" cy="9144000"/>
   <p:defaultTextStyle>
@@ -4527,9 +4527,6 @@
               </a:rPr>
               <a:t>سَكَنَ</a:t>
             </a:r>
-            <a:pPr algn="ctr" indent="0" marL="0">
-              <a:buNone/>
-            </a:pPr>
             <a:r>
               <a:rPr lang="ar-SA" altLang="en-US" sz="4290" dirty="0">
                 <a:solidFill>
@@ -6242,9 +6239,6 @@
               </a:rPr>
               <a:t>دَفَنَ</a:t>
             </a:r>
-            <a:pPr algn="ctr" indent="0" marL="0">
-              <a:buNone/>
-            </a:pPr>
             <a:r>
               <a:rPr lang="ar-SA" altLang="en-US" sz="4290" dirty="0">
                 <a:solidFill>
@@ -7957,9 +7951,6 @@
               </a:rPr>
               <a:t>خَزَنَ</a:t>
             </a:r>
-            <a:pPr algn="ctr" indent="0" marL="0">
-              <a:buNone/>
-            </a:pPr>
             <a:r>
               <a:rPr lang="ar-SA" altLang="en-US" sz="4290" dirty="0">
                 <a:solidFill>
@@ -9672,9 +9663,6 @@
               </a:rPr>
               <a:t>نَ</a:t>
             </a:r>
-            <a:pPr algn="ctr" indent="0" marL="0">
-              <a:buNone/>
-            </a:pPr>
             <a:r>
               <a:rPr lang="ar-SA" altLang="en-US" sz="4290" dirty="0">
                 <a:solidFill>
@@ -9686,9 +9674,6 @@
               </a:rPr>
               <a:t>ا</a:t>
             </a:r>
-            <a:pPr algn="ctr" indent="0" marL="0">
-              <a:buNone/>
-            </a:pPr>
             <a:r>
               <a:rPr lang="ar-SA" altLang="en-US" sz="6600" dirty="0">
                 <a:solidFill>
@@ -11401,9 +11386,6 @@
               </a:rPr>
               <a:t>نَ</a:t>
             </a:r>
-            <a:pPr algn="ctr" indent="0" marL="0">
-              <a:buNone/>
-            </a:pPr>
             <a:r>
               <a:rPr lang="ar-SA" altLang="en-US" sz="4290" dirty="0">
                 <a:solidFill>
@@ -11415,9 +11397,6 @@
               </a:rPr>
               <a:t>ا</a:t>
             </a:r>
-            <a:pPr algn="ctr" indent="0" marL="0">
-              <a:buNone/>
-            </a:pPr>
             <a:r>
               <a:rPr lang="ar-SA" altLang="en-US" sz="6600" dirty="0">
                 <a:solidFill>
@@ -13130,9 +13109,6 @@
               </a:rPr>
               <a:t>نَ</a:t>
             </a:r>
-            <a:pPr algn="ctr" indent="0" marL="0">
-              <a:buNone/>
-            </a:pPr>
             <a:r>
               <a:rPr lang="ar-SA" altLang="en-US" sz="4290" dirty="0">
                 <a:solidFill>
@@ -13144,9 +13120,6 @@
               </a:rPr>
               <a:t>ا</a:t>
             </a:r>
-            <a:pPr algn="ctr" indent="0" marL="0">
-              <a:buNone/>
-            </a:pPr>
             <a:r>
               <a:rPr lang="ar-SA" altLang="en-US" sz="6600" dirty="0">
                 <a:solidFill>
@@ -14859,9 +14832,6 @@
               </a:rPr>
               <a:t>رَمَيَ</a:t>
             </a:r>
-            <a:pPr algn="ctr" indent="0" marL="0">
-              <a:buNone/>
-            </a:pPr>
             <a:r>
               <a:rPr lang="ar-SA" altLang="en-US" sz="4290" dirty="0">
                 <a:solidFill>
@@ -16574,9 +16544,6 @@
               </a:rPr>
               <a:t>بَنَيَ</a:t>
             </a:r>
-            <a:pPr algn="ctr" indent="0" marL="0">
-              <a:buNone/>
-            </a:pPr>
             <a:r>
               <a:rPr lang="ar-SA" altLang="en-US" sz="4290" dirty="0">
                 <a:solidFill>
@@ -18289,9 +18256,6 @@
               </a:rPr>
               <a:t>سَقَيَ</a:t>
             </a:r>
-            <a:pPr algn="ctr" indent="0" marL="0">
-              <a:buNone/>
-            </a:pPr>
             <a:r>
               <a:rPr lang="ar-SA" altLang="en-US" sz="4290" dirty="0">
                 <a:solidFill>
@@ -20004,9 +19968,6 @@
               </a:rPr>
               <a:t>بَكَيَ</a:t>
             </a:r>
-            <a:pPr algn="ctr" indent="0" marL="0">
-              <a:buNone/>
-            </a:pPr>
             <a:r>
               <a:rPr lang="ar-SA" altLang="en-US" sz="4290" dirty="0">
                 <a:solidFill>
@@ -21591,9 +21552,6 @@
               </a:rPr>
               <a:t>أَنَ</a:t>
             </a:r>
-            <a:pPr algn="ctr" indent="0" marL="0">
-              <a:buNone/>
-            </a:pPr>
             <a:r>
               <a:rPr lang="ar-SA" altLang="en-US" sz="5850" dirty="0">
                 <a:solidFill>
@@ -23144,9 +23102,6 @@
               </a:rPr>
               <a:t>سَعَيَ</a:t>
             </a:r>
-            <a:pPr algn="ctr" indent="0" marL="0">
-              <a:buNone/>
-            </a:pPr>
             <a:r>
               <a:rPr lang="ar-SA" altLang="en-US" sz="4290" dirty="0">
                 <a:solidFill>
@@ -24731,9 +24686,6 @@
               </a:rPr>
               <a:t>لَنَ</a:t>
             </a:r>
-            <a:pPr algn="ctr" indent="0" marL="0">
-              <a:buNone/>
-            </a:pPr>
             <a:r>
               <a:rPr lang="ar-SA" altLang="en-US" sz="5850" dirty="0">
                 <a:solidFill>
@@ -26156,9 +26108,6 @@
               </a:rPr>
               <a:t>دَنَ</a:t>
             </a:r>
-            <a:pPr algn="ctr" indent="0" marL="0">
-              <a:buNone/>
-            </a:pPr>
             <a:r>
               <a:rPr lang="ar-SA" altLang="en-US" sz="5850" dirty="0">
                 <a:solidFill>
@@ -27581,9 +27530,6 @@
               </a:rPr>
               <a:t>نَ</a:t>
             </a:r>
-            <a:pPr algn="ctr" indent="0" marL="0">
-              <a:buNone/>
-            </a:pPr>
             <a:r>
               <a:rPr lang="ar-SA" altLang="en-US" sz="5850" dirty="0">
                 <a:solidFill>
@@ -27595,9 +27541,6 @@
               </a:rPr>
               <a:t>ا</a:t>
             </a:r>
-            <a:pPr algn="ctr" indent="0" marL="0">
-              <a:buNone/>
-            </a:pPr>
             <a:r>
               <a:rPr lang="ar-SA" altLang="en-US" sz="9000" dirty="0">
                 <a:solidFill>
@@ -29020,9 +28963,6 @@
               </a:rPr>
               <a:t>نَ</a:t>
             </a:r>
-            <a:pPr algn="ctr" indent="0" marL="0">
-              <a:buNone/>
-            </a:pPr>
             <a:r>
               <a:rPr lang="ar-SA" altLang="en-US" sz="5850" dirty="0">
                 <a:solidFill>
@@ -29034,9 +28974,6 @@
               </a:rPr>
               <a:t>ا</a:t>
             </a:r>
-            <a:pPr algn="ctr" indent="0" marL="0">
-              <a:buNone/>
-            </a:pPr>
             <a:r>
               <a:rPr lang="ar-SA" altLang="en-US" sz="9000" dirty="0">
                 <a:solidFill>
@@ -30459,9 +30396,6 @@
               </a:rPr>
               <a:t>نَ</a:t>
             </a:r>
-            <a:pPr algn="ctr" indent="0" marL="0">
-              <a:buNone/>
-            </a:pPr>
             <a:r>
               <a:rPr lang="ar-SA" altLang="en-US" sz="5850" dirty="0">
                 <a:solidFill>
@@ -30473,9 +30407,6 @@
               </a:rPr>
               <a:t>ا</a:t>
             </a:r>
-            <a:pPr algn="ctr" indent="0" marL="0">
-              <a:buNone/>
-            </a:pPr>
             <a:r>
               <a:rPr lang="ar-SA" altLang="en-US" sz="9000" dirty="0">
                 <a:solidFill>
@@ -32820,9 +32751,6 @@
               </a:rPr>
               <a:t>هَيَ</a:t>
             </a:r>
-            <a:pPr algn="ctr" indent="0" marL="0">
-              <a:buNone/>
-            </a:pPr>
             <a:r>
               <a:rPr lang="ar-SA" altLang="en-US" sz="5850" dirty="0">
                 <a:solidFill>
